--- a/data-eng/decks/w4d2s3.pptx
+++ b/data-eng/decks/w4d2s3.pptx
@@ -3100,7 +3100,7 @@
       <p:grpSpPr/>
       <p:sp>
         <p:nvSpPr>
-          <p:cNvPr id="2" name="Oval 1"/>
+          <p:cNvPr id="2" name="deckgen:decor"/>
           <p:cNvSpPr/>
           <p:nvPr/>
         </p:nvSpPr>
@@ -3130,7 +3130,7 @@
       </p:sp>
       <p:sp>
         <p:nvSpPr>
-          <p:cNvPr id="3" name="Oval 2"/>
+          <p:cNvPr id="3" name="deckgen:decor"/>
           <p:cNvSpPr/>
           <p:nvPr/>
         </p:nvSpPr>
@@ -3160,7 +3160,7 @@
       </p:sp>
       <p:sp>
         <p:nvSpPr>
-          <p:cNvPr id="4" name="Oval 3"/>
+          <p:cNvPr id="4" name="deckgen:decor"/>
           <p:cNvSpPr/>
           <p:nvPr/>
         </p:nvSpPr>
@@ -3190,7 +3190,7 @@
       </p:sp>
       <p:sp>
         <p:nvSpPr>
-          <p:cNvPr id="5" name="Rectangle 4"/>
+          <p:cNvPr id="5" name="deckgen:decor"/>
           <p:cNvSpPr/>
           <p:nvPr/>
         </p:nvSpPr>
@@ -3220,7 +3220,7 @@
       </p:sp>
       <p:sp>
         <p:nvSpPr>
-          <p:cNvPr id="6" name="Oval 5"/>
+          <p:cNvPr id="6" name="deckgen:decor"/>
           <p:cNvSpPr/>
           <p:nvPr/>
         </p:nvSpPr>
@@ -3250,7 +3250,7 @@
       </p:sp>
       <p:sp>
         <p:nvSpPr>
-          <p:cNvPr id="7" name="Oval 6"/>
+          <p:cNvPr id="7" name="deckgen:decor"/>
           <p:cNvSpPr/>
           <p:nvPr/>
         </p:nvSpPr>
@@ -3280,7 +3280,7 @@
       </p:sp>
       <p:sp>
         <p:nvSpPr>
-          <p:cNvPr id="8" name="Oval 7"/>
+          <p:cNvPr id="8" name="deckgen:decor"/>
           <p:cNvSpPr/>
           <p:nvPr/>
         </p:nvSpPr>
@@ -3310,7 +3310,7 @@
       </p:sp>
       <p:sp>
         <p:nvSpPr>
-          <p:cNvPr id="9" name="Oval 8"/>
+          <p:cNvPr id="9" name="deckgen:decor"/>
           <p:cNvSpPr/>
           <p:nvPr/>
         </p:nvSpPr>
@@ -3340,7 +3340,7 @@
       </p:sp>
       <p:sp>
         <p:nvSpPr>
-          <p:cNvPr id="10" name="Rectangle 9"/>
+          <p:cNvPr id="10" name="deckgen:decor"/>
           <p:cNvSpPr/>
           <p:nvPr/>
         </p:nvSpPr>
@@ -3600,7 +3600,7 @@
       <p:grpSpPr/>
       <p:sp>
         <p:nvSpPr>
-          <p:cNvPr id="2" name="Oval 1"/>
+          <p:cNvPr id="2" name="deckgen:decor"/>
           <p:cNvSpPr/>
           <p:nvPr/>
         </p:nvSpPr>
@@ -3630,7 +3630,7 @@
       </p:sp>
       <p:sp>
         <p:nvSpPr>
-          <p:cNvPr id="3" name="Oval 2"/>
+          <p:cNvPr id="3" name="deckgen:decor"/>
           <p:cNvSpPr/>
           <p:nvPr/>
         </p:nvSpPr>
@@ -3660,7 +3660,7 @@
       </p:sp>
       <p:sp>
         <p:nvSpPr>
-          <p:cNvPr id="4" name="Oval 3"/>
+          <p:cNvPr id="4" name="deckgen:decor"/>
           <p:cNvSpPr/>
           <p:nvPr/>
         </p:nvSpPr>
@@ -3941,7 +3941,7 @@
                 <a:ea typeface="Pretendard"/>
                 <a:cs typeface="Pretendard"/>
               </a:rPr>
-              <a:t>warehouse 버킷에 metadata/ 와 data/ 가 생겼다</a:t>
+              <a:t>INSERT 뒤 metadata.json 2 · parquet 2 를 셌다</a:t>
             </a:r>
           </a:p>
         </p:txBody>
@@ -4087,7 +4087,7 @@
                 <a:ea typeface="Pretendard"/>
                 <a:cs typeface="Pretendard"/>
               </a:rPr>
-              <a:t>snapshots 에 append · overwrite 가 나란히 보인다</a:t>
+              <a:t>snapshots 에 append · overwrite, committed_at 은 UTC</a:t>
             </a:r>
           </a:p>
         </p:txBody>
@@ -4233,7 +4233,7 @@
                 <a:ea typeface="Pretendard"/>
                 <a:cs typeface="Pretendard"/>
               </a:rPr>
-              <a:t>VERSION AS OF 는 15000, 일반 SELECT 는 20000 을 보여 준다</a:t>
+              <a:t>VERSION·TIMESTAMP AS OF 는 15000.0, 일반 SELECT 는 20000.0</a:t>
             </a:r>
           </a:p>
         </p:txBody>
@@ -4379,7 +4379,7 @@
                 <a:ea typeface="Pretendard"/>
                 <a:cs typeface="Pretendard"/>
               </a:rPr>
-              <a:t>롤백 뒤 snapshots 행이 하나 더 늘었다</a:t>
+              <a:t>롤백 뒤 snapshots 두 행 그대로 · history 세 행</a:t>
             </a:r>
           </a:p>
         </p:txBody>
@@ -4525,7 +4525,7 @@
                 <a:ea typeface="Pretendard"/>
                 <a:cs typeface="Pretendard"/>
               </a:rPr>
-              <a:t>ADD COLUMN 뒤 parquet 개수가 그대로다</a:t>
+              <a:t>parquet 이 ALTER 뒤 3 그대로, INSERT 뒤 5</a:t>
             </a:r>
           </a:p>
         </p:txBody>
@@ -4671,7 +4671,7 @@
                 <a:ea typeface="Pretendard"/>
                 <a:cs typeface="Pretendard"/>
               </a:rPr>
-              <a:t>orders 가 4행이고 channel 은 NULL·NULL·web·app 이다</a:t>
+              <a:t>메타테이블 snapshots 3 · history 4 · files 4 · manifests 2</a:t>
             </a:r>
           </a:p>
         </p:txBody>
@@ -4808,7 +4808,7 @@
       <p:grpSpPr/>
       <p:sp>
         <p:nvSpPr>
-          <p:cNvPr id="2" name="Oval 1"/>
+          <p:cNvPr id="2" name="deckgen:decor"/>
           <p:cNvSpPr/>
           <p:nvPr/>
         </p:nvSpPr>
@@ -4838,7 +4838,7 @@
       </p:sp>
       <p:sp>
         <p:nvSpPr>
-          <p:cNvPr id="3" name="Oval 2"/>
+          <p:cNvPr id="3" name="deckgen:decor"/>
           <p:cNvSpPr/>
           <p:nvPr/>
         </p:nvSpPr>
@@ -5362,7 +5362,7 @@
                 <a:ea typeface="Pretendard"/>
                 <a:cs typeface="Pretendard"/>
               </a:rPr>
-              <a:t>자주 겪는 오류 네 가지</a:t>
+              <a:t>down → up 뒤에도 count 4 인지</a:t>
             </a:r>
           </a:p>
         </p:txBody>
@@ -5478,7 +5478,7 @@
                 <a:ea typeface="Pretendard"/>
                 <a:cs typeface="Pretendard"/>
               </a:rPr>
-              <a:t>4-3 MinIO–Iceberg 파이프라인 예고</a:t>
+              <a:t>자주 겪는 오류와 4-3 예고</a:t>
             </a:r>
           </a:p>
         </p:txBody>
@@ -5615,7 +5615,7 @@
       <p:grpSpPr/>
       <p:sp>
         <p:nvSpPr>
-          <p:cNvPr id="2" name="Oval 1"/>
+          <p:cNvPr id="2" name="deckgen:decor"/>
           <p:cNvSpPr/>
           <p:nvPr/>
         </p:nvSpPr>
@@ -5645,7 +5645,7 @@
       </p:sp>
       <p:sp>
         <p:nvSpPr>
-          <p:cNvPr id="3" name="Oval 2"/>
+          <p:cNvPr id="3" name="deckgen:decor"/>
           <p:cNvSpPr/>
           <p:nvPr/>
         </p:nvSpPr>
@@ -5675,7 +5675,7 @@
       </p:sp>
       <p:sp>
         <p:nvSpPr>
-          <p:cNvPr id="4" name="Oval 3"/>
+          <p:cNvPr id="4" name="deckgen:decor"/>
           <p:cNvSpPr/>
           <p:nvPr/>
         </p:nvSpPr>
@@ -5956,7 +5956,7 @@
                 <a:ea typeface="Pretendard"/>
                 <a:cs typeface="Pretendard"/>
               </a:rPr>
-              <a:t>demo.lakehouse.orders 를 만들고 MinIO 에 생긴 파일을 본다</a:t>
+              <a:t>demo.lakehouse.orders 를 만들고 MinIO 에 생긴 파일을 센다</a:t>
             </a:r>
           </a:p>
         </p:txBody>
@@ -6102,7 +6102,7 @@
                 <a:ea typeface="Pretendard"/>
                 <a:cs typeface="Pretendard"/>
               </a:rPr>
-              <a:t>UPDATE 로 스냅샷을 쌓고 VERSION AS OF 로 과거를 조회한다</a:t>
+              <a:t>UPDATE 로 스냅샷을 쌓고 VERSION·TIMESTAMP AS OF 로 과거를 본다</a:t>
             </a:r>
           </a:p>
         </p:txBody>
@@ -6248,7 +6248,7 @@
                 <a:ea typeface="Pretendard"/>
                 <a:cs typeface="Pretendard"/>
               </a:rPr>
-              <a:t>rollback_to_snapshot 으로 되돌리고 이력이 남는 것을 본다</a:t>
+              <a:t>롤백 뒤 snapshots 는 그대로, history 가 느는 것을 본다</a:t>
             </a:r>
           </a:p>
         </p:txBody>
@@ -6394,7 +6394,7 @@
                 <a:ea typeface="Pretendard"/>
                 <a:cs typeface="Pretendard"/>
               </a:rPr>
-              <a:t>ADD COLUMN 뒤 parquet 개수가 안 느는 것을 확인한다</a:t>
+              <a:t>ADD COLUMN 뒤 parquet 이 그대로(3)인 것을 확인한다</a:t>
             </a:r>
           </a:p>
         </p:txBody>
@@ -6606,7 +6606,7 @@
       <p:grpSpPr/>
       <p:sp>
         <p:nvSpPr>
-          <p:cNvPr id="2" name="Oval 1"/>
+          <p:cNvPr id="2" name="deckgen:decor"/>
           <p:cNvSpPr/>
           <p:nvPr/>
         </p:nvSpPr>
@@ -6636,7 +6636,7 @@
       </p:sp>
       <p:sp>
         <p:nvSpPr>
-          <p:cNvPr id="3" name="Oval 2"/>
+          <p:cNvPr id="3" name="deckgen:decor"/>
           <p:cNvSpPr/>
           <p:nvPr/>
         </p:nvSpPr>
@@ -6666,7 +6666,7 @@
       </p:sp>
       <p:sp>
         <p:nvSpPr>
-          <p:cNvPr id="4" name="Oval 3"/>
+          <p:cNvPr id="4" name="deckgen:decor"/>
           <p:cNvSpPr/>
           <p:nvPr/>
         </p:nvSpPr>
@@ -6842,7 +6842,7 @@
                 <a:ea typeface="Pretendard"/>
                 <a:cs typeface="Pretendard"/>
               </a:rPr>
-              <a:t>SQL 은 spark-sql 에서, 파일 확인(mc ls)은 새 터미널에서 합니다</a:t>
+              <a:t>SQL 은 spark-sql ()&gt; 에서, 파일 세기는 새 터미널에서 — 새 터미널은 cd ~/lakehouse 부터</a:t>
             </a:r>
           </a:p>
         </p:txBody>
@@ -7111,7 +7111,7 @@
                 <a:ea typeface="Pretendard"/>
                 <a:cs typeface="Pretendard"/>
               </a:rPr>
-              <a:t>2. 파일 보기</a:t>
+              <a:t>2. 파일 세기</a:t>
             </a:r>
           </a:p>
         </p:txBody>
@@ -7152,7 +7152,7 @@
                 <a:ea typeface="Pretendard"/>
                 <a:cs typeface="Pretendard"/>
               </a:rPr>
-              <a:t>mc ls</a:t>
+              <a:t>mc ls · grep -c</a:t>
             </a:r>
           </a:p>
           <a:p>
@@ -7170,7 +7170,7 @@
                 <a:ea typeface="Pretendard"/>
                 <a:cs typeface="Pretendard"/>
               </a:rPr>
-              <a:t>metadata/ · data/</a:t>
+              <a:t>2 · 2</a:t>
             </a:r>
           </a:p>
         </p:txBody>
@@ -7644,7 +7644,7 @@
                 <a:ea typeface="Pretendard"/>
                 <a:cs typeface="Pretendard"/>
               </a:rPr>
-              <a:t>snapshots · files</a:t>
+              <a:t>snapshots · history</a:t>
             </a:r>
           </a:p>
           <a:p>
@@ -7662,7 +7662,7 @@
                 <a:ea typeface="Pretendard"/>
                 <a:cs typeface="Pretendard"/>
               </a:rPr>
-              <a:t>history</a:t>
+              <a:t>files · manifests</a:t>
             </a:r>
           </a:p>
         </p:txBody>
@@ -7799,7 +7799,7 @@
       <p:grpSpPr/>
       <p:sp>
         <p:nvSpPr>
-          <p:cNvPr id="2" name="Oval 1"/>
+          <p:cNvPr id="2" name="deckgen:decor"/>
           <p:cNvSpPr/>
           <p:nvPr/>
         </p:nvSpPr>
@@ -7829,7 +7829,7 @@
       </p:sp>
       <p:sp>
         <p:nvSpPr>
-          <p:cNvPr id="3" name="Oval 2"/>
+          <p:cNvPr id="3" name="deckgen:decor"/>
           <p:cNvSpPr/>
           <p:nvPr/>
         </p:nvSpPr>
@@ -7859,7 +7859,7 @@
       </p:sp>
       <p:sp>
         <p:nvSpPr>
-          <p:cNvPr id="4" name="Oval 3"/>
+          <p:cNvPr id="4" name="deckgen:decor"/>
           <p:cNvSpPr/>
           <p:nvPr/>
         </p:nvSpPr>
@@ -8755,7 +8755,7 @@
                 <a:ea typeface="Pretendard"/>
                 <a:cs typeface="Pretendard"/>
               </a:rPr>
-              <a:t>확인 포인트: SELECT 결과 2행 · MinIO 콘솔의 warehouse 버킷 아래에 data/ · metadata/ 폴더가 생긴다</a:t>
+              <a:t>확인 포인트: 1 kim 15000.0 · 2 lee 32000.0 두 행 · warehouse 버킷 lakehouse/orders/ 아래 data/ · metadata/</a:t>
             </a:r>
           </a:p>
         </p:txBody>
@@ -8892,7 +8892,7 @@
       <p:grpSpPr/>
       <p:sp>
         <p:nvSpPr>
-          <p:cNvPr id="2" name="Oval 1"/>
+          <p:cNvPr id="2" name="deckgen:decor"/>
           <p:cNvSpPr/>
           <p:nvPr/>
         </p:nvSpPr>
@@ -8922,7 +8922,7 @@
       </p:sp>
       <p:sp>
         <p:nvSpPr>
-          <p:cNvPr id="3" name="Oval 2"/>
+          <p:cNvPr id="3" name="deckgen:decor"/>
           <p:cNvSpPr/>
           <p:nvPr/>
         </p:nvSpPr>
@@ -8952,7 +8952,7 @@
       </p:sp>
       <p:sp>
         <p:nvSpPr>
-          <p:cNvPr id="4" name="Oval 3"/>
+          <p:cNvPr id="4" name="deckgen:decor"/>
           <p:cNvSpPr/>
           <p:nvPr/>
         </p:nvSpPr>
@@ -9900,7 +9900,7 @@
                 <a:ea typeface="Pretendard"/>
                 <a:cs typeface="Pretendard"/>
               </a:rPr>
-              <a:t>….avro</a:t>
+              <a:t>…-m0.avro</a:t>
             </a:r>
           </a:p>
         </p:txBody>
@@ -10241,7 +10241,7 @@
                 <a:ea typeface="Pretendard"/>
                 <a:cs typeface="Pretendard"/>
               </a:rPr>
-              <a:t>커밋할 때마다 metadata.json 이 하나씩 늘어난다 — 다음 단계에서 확인</a:t>
+              <a:t>parquet 2 — VALUES 두 행을 Task 둘이 각자 한 파일씩 썼다</a:t>
             </a:r>
           </a:p>
         </p:txBody>
@@ -10282,7 +10282,7 @@
                 <a:ea typeface="Pretendard"/>
                 <a:cs typeface="Pretendard"/>
               </a:rPr>
-              <a:t>docker compose exec mc mc ls --recursive local/warehouse — grep -c 로 세면 metadata.json 2개 안팎(생성 + INSERT) · parquet 1개</a:t>
+              <a:t>cd ~/lakehouse → mc ls --recursive local/warehouse · grep -c 로 세면 metadata.json 2 · parquet 2</a:t>
             </a:r>
           </a:p>
         </p:txBody>
@@ -10419,7 +10419,7 @@
       <p:grpSpPr/>
       <p:sp>
         <p:nvSpPr>
-          <p:cNvPr id="2" name="Oval 1"/>
+          <p:cNvPr id="2" name="deckgen:decor"/>
           <p:cNvSpPr/>
           <p:nvPr/>
         </p:nvSpPr>
@@ -10449,7 +10449,7 @@
       </p:sp>
       <p:sp>
         <p:nvSpPr>
-          <p:cNvPr id="3" name="Oval 2"/>
+          <p:cNvPr id="3" name="deckgen:decor"/>
           <p:cNvSpPr/>
           <p:nvPr/>
         </p:nvSpPr>
@@ -10479,7 +10479,7 @@
       </p:sp>
       <p:sp>
         <p:nvSpPr>
-          <p:cNvPr id="4" name="Oval 3"/>
+          <p:cNvPr id="4" name="deckgen:decor"/>
           <p:cNvSpPr/>
           <p:nvPr/>
         </p:nvSpPr>
@@ -10584,7 +10584,7 @@
                 <a:ea typeface="Pretendard"/>
                 <a:cs typeface="Pretendard"/>
               </a:rPr>
-              <a:t>UPDATE 로 스냅샷을 쌓고, 두 시점을 나란히 본다</a:t>
+              <a:t>UPDATE 로 스냅샷을 쌓고, 두 시점을 본다</a:t>
             </a:r>
           </a:p>
         </p:txBody>
@@ -10801,7 +10801,7 @@
                 <a:ea typeface="Pretendard"/>
                 <a:cs typeface="Pretendard"/>
               </a:rPr>
-              <a:t>스냅샷이 하나 더 남는다</a:t>
+              <a:t>snapshots 두 행 — operation 이 append · overwrite</a:t>
             </a:r>
           </a:p>
         </p:txBody>
@@ -10947,7 +10947,7 @@
                 <a:ea typeface="Pretendard"/>
                 <a:cs typeface="Pretendard"/>
               </a:rPr>
-              <a:t>SELECT … FROM demo.lakehouse.orders.snapshots</a:t>
+              <a:t>첫 줄(append)의 snapshot_id · committed_at 복사</a:t>
             </a:r>
           </a:p>
         </p:txBody>
@@ -10988,7 +10988,7 @@
                 <a:ea typeface="Pretendard"/>
                 <a:cs typeface="Pretendard"/>
               </a:rPr>
-              <a:t>operation 이 append · overwrite — 첫(가장 오래된) snapshot_id 를 복사</a:t>
+              <a:t>committed_at 은 UTC — 한국 시각보다 9시간 이르다</a:t>
             </a:r>
           </a:p>
         </p:txBody>
@@ -11134,7 +11134,7 @@
                 <a:ea typeface="Pretendard"/>
                 <a:cs typeface="Pretendard"/>
               </a:rPr>
-              <a:t>SELECT * FROM … VERSION AS OF &lt;snapshot_id&gt;</a:t>
+              <a:t>VERSION AS OF &lt;id&gt; · TIMESTAMP AS OF '&lt;committed_at&gt;'</a:t>
             </a:r>
           </a:p>
         </p:txBody>
@@ -11175,7 +11175,7 @@
                 <a:ea typeface="Pretendard"/>
                 <a:cs typeface="Pretendard"/>
               </a:rPr>
-              <a:t>UPDATE 이전 값 15000 · 일반 SELECT 는 20000</a:t>
+              <a:t>둘 다 15000.0 · 일반 SELECT 는 20000.0</a:t>
             </a:r>
           </a:p>
         </p:txBody>
@@ -11362,7 +11362,7 @@
                 <a:ea typeface="Pretendard"/>
                 <a:cs typeface="Pretendard"/>
               </a:rPr>
-              <a:t>order_id 1 의 amount 가 15000 과 20000 으로 나란히</a:t>
+              <a:t>네 줄 — order_id 1 만 15000.0 과 20000.0 으로 다르다</a:t>
             </a:r>
           </a:p>
         </p:txBody>
@@ -11437,7 +11437,7 @@
                 <a:ea typeface="Pretendard"/>
                 <a:cs typeface="Pretendard"/>
               </a:rPr>
-              <a:t>왜 overwrite 인가</a:t>
+              <a:t>예시 숫자 그대로면</a:t>
             </a:r>
           </a:p>
         </p:txBody>
@@ -11478,7 +11478,7 @@
                 <a:ea typeface="Pretendard"/>
                 <a:cs typeface="Pretendard"/>
               </a:rPr>
-              <a:t>파일 통째로</a:t>
+              <a:t>Cannot find</a:t>
             </a:r>
           </a:p>
           <a:p>
@@ -11496,7 +11496,7 @@
                 <a:ea typeface="Pretendard"/>
                 <a:cs typeface="Pretendard"/>
               </a:rPr>
-              <a:t>다시 쓴다</a:t>
+              <a:t>snapshot</a:t>
             </a:r>
           </a:p>
         </p:txBody>
@@ -11633,7 +11633,7 @@
       <p:grpSpPr/>
       <p:sp>
         <p:nvSpPr>
-          <p:cNvPr id="2" name="Oval 1"/>
+          <p:cNvPr id="2" name="deckgen:decor"/>
           <p:cNvSpPr/>
           <p:nvPr/>
         </p:nvSpPr>
@@ -11663,7 +11663,7 @@
       </p:sp>
       <p:sp>
         <p:nvSpPr>
-          <p:cNvPr id="3" name="Oval 2"/>
+          <p:cNvPr id="3" name="deckgen:decor"/>
           <p:cNvSpPr/>
           <p:nvPr/>
         </p:nvSpPr>
@@ -11693,7 +11693,7 @@
       </p:sp>
       <p:sp>
         <p:nvSpPr>
-          <p:cNvPr id="4" name="Oval 3"/>
+          <p:cNvPr id="4" name="deckgen:decor"/>
           <p:cNvSpPr/>
           <p:nvPr/>
         </p:nvSpPr>
@@ -11798,7 +11798,7 @@
                 <a:ea typeface="Pretendard"/>
                 <a:cs typeface="Pretendard"/>
               </a:rPr>
-              <a:t>스냅샷 id 를 따옴표로 감싸 보기</a:t>
+              <a:t>시각을 잘못 넣어 보기 — 기준은 UTC</a:t>
             </a:r>
           </a:p>
         </p:txBody>
@@ -11869,7 +11869,7 @@
                 <a:ea typeface="Pretendard"/>
                 <a:cs typeface="Pretendard"/>
               </a:rPr>
-              <a:t>실패 — VERSION AS OF '1234…'</a:t>
+              <a:t>테이블을 만들기 전 날짜로 넣기</a:t>
             </a:r>
           </a:p>
         </p:txBody>
@@ -11910,7 +11910,7 @@
                 <a:ea typeface="Pretendard"/>
                 <a:cs typeface="Pretendard"/>
               </a:rPr>
-              <a:t>id 를 문자열로 주면 스냅샷을 찾지 못한다</a:t>
+              <a:t>'2026-09-06 09:00:00' — 그때는 테이블이 없었다</a:t>
             </a:r>
           </a:p>
         </p:txBody>
@@ -12015,7 +12015,7 @@
                 <a:ea typeface="Pretendard"/>
                 <a:cs typeface="Pretendard"/>
               </a:rPr>
-              <a:t>Cannot find snapshot 오류</a:t>
+              <a:t>Cannot find a snapshot older than</a:t>
             </a:r>
           </a:p>
         </p:txBody>
@@ -12086,7 +12086,7 @@
                 <a:ea typeface="Pretendard"/>
                 <a:cs typeface="Pretendard"/>
               </a:rPr>
-              <a:t>없는 id 를 썼을 때도 같은 메시지</a:t>
+              <a:t>…2026-09-06T09:00:00+00:00</a:t>
             </a:r>
           </a:p>
         </p:txBody>
@@ -12157,7 +12157,7 @@
                 <a:ea typeface="Pretendard"/>
                 <a:cs typeface="Pretendard"/>
               </a:rPr>
-              <a:t>TIMESTAMP AS OF 는 반대로 따옴표가 필요</a:t>
+              <a:t>끝의 +00:00 = UTC 로 읽었다는 표시</a:t>
             </a:r>
           </a:p>
         </p:txBody>
@@ -12198,7 +12198,7 @@
                 <a:ea typeface="Pretendard"/>
                 <a:cs typeface="Pretendard"/>
               </a:rPr>
-              <a:t>성공 — VERSION AS OF 1234…</a:t>
+              <a:t>한국 시각(+9시간)으로 넣기</a:t>
             </a:r>
           </a:p>
         </p:txBody>
@@ -12239,7 +12239,7 @@
                 <a:ea typeface="Pretendard"/>
                 <a:cs typeface="Pretendard"/>
               </a:rPr>
-              <a:t>snapshots 의 숫자를 그대로 따옴표 없이</a:t>
+              <a:t>오류가 없어서 더 위험하다</a:t>
             </a:r>
           </a:p>
         </p:txBody>
@@ -12344,7 +12344,7 @@
                 <a:ea typeface="Pretendard"/>
                 <a:cs typeface="Pretendard"/>
               </a:rPr>
-              <a:t>orders.snapshots 에서 snapshot_id 복사</a:t>
+              <a:t>오류 없이 amount 20000.0(현재 값)</a:t>
             </a:r>
           </a:p>
         </p:txBody>
@@ -12415,7 +12415,7 @@
                 <a:ea typeface="Pretendard"/>
                 <a:cs typeface="Pretendard"/>
               </a:rPr>
-              <a:t>따옴표 없는 숫자로 넣는다</a:t>
+              <a:t>UTC 로 읽어 9시간 뒤 = UPDATE 뒤</a:t>
             </a:r>
           </a:p>
         </p:txBody>
@@ -12486,7 +12486,7 @@
                 <a:ea typeface="Pretendard"/>
                 <a:cs typeface="Pretendard"/>
               </a:rPr>
-              <a:t>UPDATE 이전 값 15000 이 돌아온다</a:t>
+              <a:t>committed_at 값을 그대로 복사한다</a:t>
             </a:r>
           </a:p>
         </p:txBody>
@@ -12694,7 +12694,7 @@
       <p:grpSpPr/>
       <p:sp>
         <p:nvSpPr>
-          <p:cNvPr id="2" name="Oval 1"/>
+          <p:cNvPr id="2" name="deckgen:decor"/>
           <p:cNvSpPr/>
           <p:nvPr/>
         </p:nvSpPr>
@@ -12724,7 +12724,7 @@
       </p:sp>
       <p:sp>
         <p:nvSpPr>
-          <p:cNvPr id="3" name="Oval 2"/>
+          <p:cNvPr id="3" name="deckgen:decor"/>
           <p:cNvSpPr/>
           <p:nvPr/>
         </p:nvSpPr>
@@ -12754,7 +12754,7 @@
       </p:sp>
       <p:sp>
         <p:nvSpPr>
-          <p:cNvPr id="4" name="Oval 3"/>
+          <p:cNvPr id="4" name="deckgen:decor"/>
           <p:cNvSpPr/>
           <p:nvPr/>
         </p:nvSpPr>
@@ -12859,7 +12859,7 @@
                 <a:ea typeface="Pretendard"/>
                 <a:cs typeface="Pretendard"/>
               </a:rPr>
-              <a:t>롤백은 새 커밋, 컬럼 추가는 메타데이터만</a:t>
+              <a:t>롤백은 포인터 이동, 컬럼 추가는 메타데이터만</a:t>
             </a:r>
           </a:p>
         </p:txBody>
@@ -13035,7 +13035,7 @@
                 <a:ea typeface="Pretendard"/>
                 <a:cs typeface="Pretendard"/>
               </a:rPr>
-              <a:t>CALL demo.system.rollback_to_snapshot('lakehouse.orders', id)</a:t>
+              <a:t>CALL demo.system.rollback_to_snapshot(…, 첫 id)</a:t>
             </a:r>
           </a:p>
         </p:txBody>
@@ -13076,7 +13076,7 @@
                 <a:ea typeface="Pretendard"/>
                 <a:cs typeface="Pretendard"/>
               </a:rPr>
-              <a:t>amount 가 15000 으로 돌아오고 snapshots 에 행이 하나 더</a:t>
+              <a:t>한 줄 반환 · amount 가 15000.0 으로 돌아온다</a:t>
             </a:r>
           </a:p>
         </p:txBody>
@@ -13222,7 +13222,7 @@
                 <a:ea typeface="Pretendard"/>
                 <a:cs typeface="Pretendard"/>
               </a:rPr>
-              <a:t>롤백은 지우기가 아니다</a:t>
+              <a:t>snapshots 는 두 행 그대로 · history 는 세 행</a:t>
             </a:r>
           </a:p>
         </p:txBody>
@@ -13263,7 +13263,7 @@
                 <a:ea typeface="Pretendard"/>
                 <a:cs typeface="Pretendard"/>
               </a:rPr>
-              <a:t>옛 상태를 가리키는 새 커밋이라 이력이 남는다</a:t>
+              <a:t>셋째 줄이 첫 id · overwrite 줄 is_current_ancestor 는 false</a:t>
             </a:r>
           </a:p>
         </p:txBody>
@@ -13450,7 +13450,7 @@
                 <a:ea typeface="Pretendard"/>
                 <a:cs typeface="Pretendard"/>
               </a:rPr>
-              <a:t>DESCRIBE 에 channel 추가 · 기존 2행은 NULL</a:t>
+              <a:t>DESCRIBE 다섯 컬럼 · 기존 2행은 NULL · parquet 3 그대로</a:t>
             </a:r>
           </a:p>
         </p:txBody>
@@ -13637,7 +13637,7 @@
                 <a:ea typeface="Pretendard"/>
                 <a:cs typeface="Pretendard"/>
               </a:rPr>
-              <a:t>parquet 은 INSERT 만큼만 늘고 ALTER 로는 안 는다</a:t>
+              <a:t>parquet 은 INSERT 만큼만 늘어 3 → 5</a:t>
             </a:r>
           </a:p>
         </p:txBody>
@@ -13712,7 +13712,7 @@
                 <a:ea typeface="Pretendard"/>
                 <a:cs typeface="Pretendard"/>
               </a:rPr>
-              <a:t>expire_snapshots</a:t>
+              <a:t>parquet 개수</a:t>
             </a:r>
           </a:p>
         </p:txBody>
@@ -13753,7 +13753,7 @@
                 <a:ea typeface="Pretendard"/>
                 <a:cs typeface="Pretendard"/>
               </a:rPr>
-              <a:t>정리한 뒤론</a:t>
+              <a:t>2 → 3 → 5</a:t>
             </a:r>
           </a:p>
           <a:p>
@@ -13771,7 +13771,7 @@
                 <a:ea typeface="Pretendard"/>
                 <a:cs typeface="Pretendard"/>
               </a:rPr>
-              <a:t>못 돌아감</a:t>
+              <a:t>ALTER 는 0</a:t>
             </a:r>
           </a:p>
         </p:txBody>
@@ -13908,7 +13908,7 @@
       <p:grpSpPr/>
       <p:sp>
         <p:nvSpPr>
-          <p:cNvPr id="2" name="Oval 1"/>
+          <p:cNvPr id="2" name="deckgen:decor"/>
           <p:cNvSpPr/>
           <p:nvPr/>
         </p:nvSpPr>
@@ -13938,7 +13938,7 @@
       </p:sp>
       <p:sp>
         <p:nvSpPr>
-          <p:cNvPr id="3" name="Oval 2"/>
+          <p:cNvPr id="3" name="deckgen:decor"/>
           <p:cNvSpPr/>
           <p:nvPr/>
         </p:nvSpPr>
@@ -13968,7 +13968,7 @@
       </p:sp>
       <p:sp>
         <p:nvSpPr>
-          <p:cNvPr id="4" name="Oval 3"/>
+          <p:cNvPr id="4" name="deckgen:decor"/>
           <p:cNvSpPr/>
           <p:nvPr/>
         </p:nvSpPr>
@@ -14117,7 +14117,7 @@
         <p:spPr>
           <a:xfrm>
             <a:off x="1143000" y="2781300"/>
-            <a:ext cx="5402580" cy="590550"/>
+            <a:ext cx="4762500" cy="590550"/>
           </a:xfrm>
           <a:prstGeom prst="rect">
             <a:avLst/>
@@ -14147,7 +14147,7 @@
         <p:spPr>
           <a:xfrm>
             <a:off x="1143000" y="2781300"/>
-            <a:ext cx="5402580" cy="590550"/>
+            <a:ext cx="4762500" cy="590550"/>
           </a:xfrm>
           <a:prstGeom prst="rect">
             <a:avLst/>
@@ -14187,8 +14187,8 @@
         </p:nvSpPr>
         <p:spPr>
           <a:xfrm>
-            <a:off x="6583680" y="2781300"/>
-            <a:ext cx="10561320" cy="590550"/>
+            <a:off x="5943600" y="2781300"/>
+            <a:ext cx="8923020" cy="590550"/>
           </a:xfrm>
           <a:prstGeom prst="rect">
             <a:avLst/>
@@ -14217,8 +14217,8 @@
         </p:nvSpPr>
         <p:spPr>
           <a:xfrm>
-            <a:off x="6583680" y="2781300"/>
-            <a:ext cx="10561320" cy="590550"/>
+            <a:off x="5943600" y="2781300"/>
+            <a:ext cx="8923020" cy="590550"/>
           </a:xfrm>
           <a:prstGeom prst="rect">
             <a:avLst/>
@@ -14252,14 +14252,85 @@
       </p:sp>
       <p:sp>
         <p:nvSpPr>
-          <p:cNvPr id="12" name="Rounded Rectangle 11"/>
+          <p:cNvPr id="12" name="Rectangle 11"/>
+          <p:cNvSpPr/>
+          <p:nvPr/>
+        </p:nvSpPr>
+        <p:spPr>
+          <a:xfrm>
+            <a:off x="14904720" y="2781300"/>
+            <a:ext cx="2240280" cy="590550"/>
+          </a:xfrm>
+          <a:prstGeom prst="rect">
+            <a:avLst/>
+          </a:prstGeom>
+          <a:solidFill>
+            <a:srgbClr val="1E5BC6"/>
+          </a:solidFill>
+          <a:ln>
+            <a:noFill/>
+          </a:ln>
+          <a:effectLst/>
+        </p:spPr>
+        <p:txBody>
+          <a:bodyPr rtlCol="0" anchor="ctr" wrap="square"/>
+          <a:lstStyle/>
+          <a:p>
+            <a:pPr algn="ctr"/>
+          </a:p>
+        </p:txBody>
+      </p:sp>
+      <p:sp>
+        <p:nvSpPr>
+          <p:cNvPr id="13" name="TextBox 12"/>
+          <p:cNvSpPr txBox="1"/>
+          <p:nvPr/>
+        </p:nvSpPr>
+        <p:spPr>
+          <a:xfrm>
+            <a:off x="14904720" y="2781300"/>
+            <a:ext cx="2240280" cy="590550"/>
+          </a:xfrm>
+          <a:prstGeom prst="rect">
+            <a:avLst/>
+          </a:prstGeom>
+          <a:noFill/>
+        </p:spPr>
+        <p:txBody>
+          <a:bodyPr wrap="square" lIns="0" rIns="0" tIns="0" bIns="0" anchor="ctr">
+            <a:spAutoFit/>
+          </a:bodyPr>
+          <a:lstStyle/>
+          <a:p>
+            <a:pPr algn="ctr">
+              <a:lnSpc>
+                <a:spcPct val="100000"/>
+              </a:lnSpc>
+            </a:pPr>
+            <a:r>
+              <a:rPr sz="2025" b="1">
+                <a:solidFill>
+                  <a:srgbClr val="FFFFFF"/>
+                </a:solidFill>
+                <a:latin typeface="Pretendard"/>
+                <a:ea typeface="Pretendard"/>
+                <a:cs typeface="Pretendard"/>
+              </a:rPr>
+              <a:t>지금</a:t>
+            </a:r>
+          </a:p>
+        </p:txBody>
+      </p:sp>
+      <p:sp>
+        <p:nvSpPr>
+          <p:cNvPr id="14" name="Rounded Rectangle 13"/>
           <p:cNvSpPr/>
           <p:nvPr/>
         </p:nvSpPr>
         <p:spPr>
           <a:xfrm>
             <a:off x="1143000" y="3448050"/>
-            <a:ext cx="5402580" cy="647700"/>
+            <a:ext cx="4762500" cy="647700"/>
           </a:xfrm>
           <a:prstGeom prst="roundRect">
             <a:avLst>
@@ -14286,14 +14357,14 @@
       </p:sp>
       <p:sp>
         <p:nvSpPr>
-          <p:cNvPr id="13" name="TextBox 12"/>
+          <p:cNvPr id="15" name="TextBox 14"/>
           <p:cNvSpPr txBox="1"/>
           <p:nvPr/>
         </p:nvSpPr>
         <p:spPr>
           <a:xfrm>
             <a:off x="1238250" y="3448050"/>
-            <a:ext cx="5212080" cy="647700"/>
+            <a:ext cx="4572000" cy="647700"/>
           </a:xfrm>
           <a:prstGeom prst="rect">
             <a:avLst/>
@@ -14327,14 +14398,14 @@
       </p:sp>
       <p:sp>
         <p:nvSpPr>
-          <p:cNvPr id="14" name="Rounded Rectangle 13"/>
-          <p:cNvSpPr/>
-          <p:nvPr/>
-        </p:nvSpPr>
-        <p:spPr>
-          <a:xfrm>
-            <a:off x="6583680" y="3448050"/>
-            <a:ext cx="10561320" cy="647700"/>
+          <p:cNvPr id="16" name="Rounded Rectangle 15"/>
+          <p:cNvSpPr/>
+          <p:nvPr/>
+        </p:nvSpPr>
+        <p:spPr>
+          <a:xfrm>
+            <a:off x="5943600" y="3448050"/>
+            <a:ext cx="8923020" cy="647700"/>
           </a:xfrm>
           <a:prstGeom prst="roundRect">
             <a:avLst>
@@ -14361,14 +14432,14 @@
       </p:sp>
       <p:sp>
         <p:nvSpPr>
-          <p:cNvPr id="15" name="TextBox 14"/>
-          <p:cNvSpPr txBox="1"/>
-          <p:nvPr/>
-        </p:nvSpPr>
-        <p:spPr>
-          <a:xfrm>
-            <a:off x="6678930" y="3448050"/>
-            <a:ext cx="10370820" cy="647700"/>
+          <p:cNvPr id="17" name="TextBox 16"/>
+          <p:cNvSpPr txBox="1"/>
+          <p:nvPr/>
+        </p:nvSpPr>
+        <p:spPr>
+          <a:xfrm>
+            <a:off x="6038850" y="3448050"/>
+            <a:ext cx="8732520" cy="647700"/>
           </a:xfrm>
           <a:prstGeom prst="rect">
             <a:avLst/>
@@ -14395,21 +14466,21 @@
                 <a:ea typeface="Pretendard"/>
                 <a:cs typeface="Pretendard"/>
               </a:rPr>
-              <a:t>스냅샷 이력 — committed_at · operation</a:t>
-            </a:r>
-          </a:p>
-        </p:txBody>
-      </p:sp>
-      <p:sp>
-        <p:nvSpPr>
-          <p:cNvPr id="16" name="Rounded Rectangle 15"/>
-          <p:cNvSpPr/>
-          <p:nvPr/>
-        </p:nvSpPr>
-        <p:spPr>
-          <a:xfrm>
-            <a:off x="1143000" y="4171950"/>
-            <a:ext cx="5402580" cy="647700"/>
+              <a:t>스냅샷 — append · overwrite · append</a:t>
+            </a:r>
+          </a:p>
+        </p:txBody>
+      </p:sp>
+      <p:sp>
+        <p:nvSpPr>
+          <p:cNvPr id="18" name="Rounded Rectangle 17"/>
+          <p:cNvSpPr/>
+          <p:nvPr/>
+        </p:nvSpPr>
+        <p:spPr>
+          <a:xfrm>
+            <a:off x="14904720" y="3448050"/>
+            <a:ext cx="2240280" cy="647700"/>
           </a:xfrm>
           <a:prstGeom prst="roundRect">
             <a:avLst>
@@ -14417,6 +14488,81 @@
             </a:avLst>
           </a:prstGeom>
           <a:solidFill>
+            <a:srgbClr val="FAFBFD"/>
+          </a:solidFill>
+          <a:ln w="9525">
+            <a:solidFill>
+              <a:srgbClr val="DCE1E8"/>
+            </a:solidFill>
+          </a:ln>
+          <a:effectLst/>
+        </p:spPr>
+        <p:txBody>
+          <a:bodyPr rtlCol="0" anchor="ctr" wrap="square"/>
+          <a:lstStyle/>
+          <a:p>
+            <a:pPr algn="ctr"/>
+          </a:p>
+        </p:txBody>
+      </p:sp>
+      <p:sp>
+        <p:nvSpPr>
+          <p:cNvPr id="19" name="TextBox 18"/>
+          <p:cNvSpPr txBox="1"/>
+          <p:nvPr/>
+        </p:nvSpPr>
+        <p:spPr>
+          <a:xfrm>
+            <a:off x="14999970" y="3448050"/>
+            <a:ext cx="2049780" cy="647700"/>
+          </a:xfrm>
+          <a:prstGeom prst="rect">
+            <a:avLst/>
+          </a:prstGeom>
+          <a:noFill/>
+        </p:spPr>
+        <p:txBody>
+          <a:bodyPr wrap="square" lIns="0" rIns="0" tIns="0" bIns="0" anchor="ctr">
+            <a:spAutoFit/>
+          </a:bodyPr>
+          <a:lstStyle/>
+          <a:p>
+            <a:pPr algn="ctr">
+              <a:lnSpc>
+                <a:spcPct val="115000"/>
+              </a:lnSpc>
+            </a:pPr>
+            <a:r>
+              <a:rPr sz="1875" b="0">
+                <a:solidFill>
+                  <a:srgbClr val="3D3D3D"/>
+                </a:solidFill>
+                <a:latin typeface="Pretendard"/>
+                <a:ea typeface="Pretendard"/>
+                <a:cs typeface="Pretendard"/>
+              </a:rPr>
+              <a:t>3행</a:t>
+            </a:r>
+          </a:p>
+        </p:txBody>
+      </p:sp>
+      <p:sp>
+        <p:nvSpPr>
+          <p:cNvPr id="20" name="Rounded Rectangle 19"/>
+          <p:cNvSpPr/>
+          <p:nvPr/>
+        </p:nvSpPr>
+        <p:spPr>
+          <a:xfrm>
+            <a:off x="1143000" y="4171950"/>
+            <a:ext cx="4762500" cy="647700"/>
+          </a:xfrm>
+          <a:prstGeom prst="roundRect">
+            <a:avLst>
+              <a:gd name="adj" fmla="val 5882"/>
+            </a:avLst>
+          </a:prstGeom>
+          <a:solidFill>
             <a:srgbClr val="EDF3FD"/>
           </a:solidFill>
           <a:ln w="9525">
@@ -14436,14 +14582,14 @@
       </p:sp>
       <p:sp>
         <p:nvSpPr>
-          <p:cNvPr id="17" name="TextBox 16"/>
+          <p:cNvPr id="21" name="TextBox 20"/>
           <p:cNvSpPr txBox="1"/>
           <p:nvPr/>
         </p:nvSpPr>
         <p:spPr>
           <a:xfrm>
             <a:off x="1238250" y="4171950"/>
-            <a:ext cx="5212080" cy="647700"/>
+            <a:ext cx="4572000" cy="647700"/>
           </a:xfrm>
           <a:prstGeom prst="rect">
             <a:avLst/>
@@ -14477,14 +14623,14 @@
       </p:sp>
       <p:sp>
         <p:nvSpPr>
-          <p:cNvPr id="18" name="Rounded Rectangle 17"/>
-          <p:cNvSpPr/>
-          <p:nvPr/>
-        </p:nvSpPr>
-        <p:spPr>
-          <a:xfrm>
-            <a:off x="6583680" y="4171950"/>
-            <a:ext cx="10561320" cy="647700"/>
+          <p:cNvPr id="22" name="Rounded Rectangle 21"/>
+          <p:cNvSpPr/>
+          <p:nvPr/>
+        </p:nvSpPr>
+        <p:spPr>
+          <a:xfrm>
+            <a:off x="5943600" y="4171950"/>
+            <a:ext cx="8923020" cy="647700"/>
           </a:xfrm>
           <a:prstGeom prst="roundRect">
             <a:avLst>
@@ -14511,14 +14657,14 @@
       </p:sp>
       <p:sp>
         <p:nvSpPr>
-          <p:cNvPr id="19" name="TextBox 18"/>
-          <p:cNvSpPr txBox="1"/>
-          <p:nvPr/>
-        </p:nvSpPr>
-        <p:spPr>
-          <a:xfrm>
-            <a:off x="6678930" y="4171950"/>
-            <a:ext cx="10370820" cy="647700"/>
+          <p:cNvPr id="23" name="TextBox 22"/>
+          <p:cNvSpPr txBox="1"/>
+          <p:nvPr/>
+        </p:nvSpPr>
+        <p:spPr>
+          <a:xfrm>
+            <a:off x="6038850" y="4171950"/>
+            <a:ext cx="8732520" cy="647700"/>
           </a:xfrm>
           <a:prstGeom prst="rect">
             <a:avLst/>
@@ -14545,21 +14691,21 @@
                 <a:ea typeface="Pretendard"/>
                 <a:cs typeface="Pretendard"/>
               </a:rPr>
-              <a:t>커밋 이력 — 부모 스냅샷 관계까지</a:t>
-            </a:r>
-          </a:p>
-        </p:txBody>
-      </p:sp>
-      <p:sp>
-        <p:nvSpPr>
-          <p:cNvPr id="20" name="Rounded Rectangle 19"/>
-          <p:cNvSpPr/>
-          <p:nvPr/>
-        </p:nvSpPr>
-        <p:spPr>
-          <a:xfrm>
-            <a:off x="1143000" y="4895850"/>
-            <a:ext cx="5402580" cy="647700"/>
+              <a:t>「현재」가 가리킨 스냅샷의 이력</a:t>
+            </a:r>
+          </a:p>
+        </p:txBody>
+      </p:sp>
+      <p:sp>
+        <p:nvSpPr>
+          <p:cNvPr id="24" name="Rounded Rectangle 23"/>
+          <p:cNvSpPr/>
+          <p:nvPr/>
+        </p:nvSpPr>
+        <p:spPr>
+          <a:xfrm>
+            <a:off x="14904720" y="4171950"/>
+            <a:ext cx="2240280" cy="647700"/>
           </a:xfrm>
           <a:prstGeom prst="roundRect">
             <a:avLst>
@@ -14567,6 +14713,81 @@
             </a:avLst>
           </a:prstGeom>
           <a:solidFill>
+            <a:srgbClr val="FAFBFD"/>
+          </a:solidFill>
+          <a:ln w="9525">
+            <a:solidFill>
+              <a:srgbClr val="DCE1E8"/>
+            </a:solidFill>
+          </a:ln>
+          <a:effectLst/>
+        </p:spPr>
+        <p:txBody>
+          <a:bodyPr rtlCol="0" anchor="ctr" wrap="square"/>
+          <a:lstStyle/>
+          <a:p>
+            <a:pPr algn="ctr"/>
+          </a:p>
+        </p:txBody>
+      </p:sp>
+      <p:sp>
+        <p:nvSpPr>
+          <p:cNvPr id="25" name="TextBox 24"/>
+          <p:cNvSpPr txBox="1"/>
+          <p:nvPr/>
+        </p:nvSpPr>
+        <p:spPr>
+          <a:xfrm>
+            <a:off x="14999970" y="4171950"/>
+            <a:ext cx="2049780" cy="647700"/>
+          </a:xfrm>
+          <a:prstGeom prst="rect">
+            <a:avLst/>
+          </a:prstGeom>
+          <a:noFill/>
+        </p:spPr>
+        <p:txBody>
+          <a:bodyPr wrap="square" lIns="0" rIns="0" tIns="0" bIns="0" anchor="ctr">
+            <a:spAutoFit/>
+          </a:bodyPr>
+          <a:lstStyle/>
+          <a:p>
+            <a:pPr algn="ctr">
+              <a:lnSpc>
+                <a:spcPct val="115000"/>
+              </a:lnSpc>
+            </a:pPr>
+            <a:r>
+              <a:rPr sz="1875" b="0">
+                <a:solidFill>
+                  <a:srgbClr val="3D3D3D"/>
+                </a:solidFill>
+                <a:latin typeface="Pretendard"/>
+                <a:ea typeface="Pretendard"/>
+                <a:cs typeface="Pretendard"/>
+              </a:rPr>
+              <a:t>4행</a:t>
+            </a:r>
+          </a:p>
+        </p:txBody>
+      </p:sp>
+      <p:sp>
+        <p:nvSpPr>
+          <p:cNvPr id="26" name="Rounded Rectangle 25"/>
+          <p:cNvSpPr/>
+          <p:nvPr/>
+        </p:nvSpPr>
+        <p:spPr>
+          <a:xfrm>
+            <a:off x="1143000" y="4895850"/>
+            <a:ext cx="4762500" cy="647700"/>
+          </a:xfrm>
+          <a:prstGeom prst="roundRect">
+            <a:avLst>
+              <a:gd name="adj" fmla="val 5882"/>
+            </a:avLst>
+          </a:prstGeom>
+          <a:solidFill>
             <a:srgbClr val="EDF3FD"/>
           </a:solidFill>
           <a:ln w="9525">
@@ -14586,14 +14807,14 @@
       </p:sp>
       <p:sp>
         <p:nvSpPr>
-          <p:cNvPr id="21" name="TextBox 20"/>
+          <p:cNvPr id="27" name="TextBox 26"/>
           <p:cNvSpPr txBox="1"/>
           <p:nvPr/>
         </p:nvSpPr>
         <p:spPr>
           <a:xfrm>
             <a:off x="1238250" y="4895850"/>
-            <a:ext cx="5212080" cy="647700"/>
+            <a:ext cx="4572000" cy="647700"/>
           </a:xfrm>
           <a:prstGeom prst="rect">
             <a:avLst/>
@@ -14627,14 +14848,14 @@
       </p:sp>
       <p:sp>
         <p:nvSpPr>
-          <p:cNvPr id="22" name="Rounded Rectangle 21"/>
-          <p:cNvSpPr/>
-          <p:nvPr/>
-        </p:nvSpPr>
-        <p:spPr>
-          <a:xfrm>
-            <a:off x="6583680" y="4895850"/>
-            <a:ext cx="10561320" cy="647700"/>
+          <p:cNvPr id="28" name="Rounded Rectangle 27"/>
+          <p:cNvSpPr/>
+          <p:nvPr/>
+        </p:nvSpPr>
+        <p:spPr>
+          <a:xfrm>
+            <a:off x="5943600" y="4895850"/>
+            <a:ext cx="8923020" cy="647700"/>
           </a:xfrm>
           <a:prstGeom prst="roundRect">
             <a:avLst>
@@ -14661,14 +14882,14 @@
       </p:sp>
       <p:sp>
         <p:nvSpPr>
-          <p:cNvPr id="23" name="TextBox 22"/>
-          <p:cNvSpPr txBox="1"/>
-          <p:nvPr/>
-        </p:nvSpPr>
-        <p:spPr>
-          <a:xfrm>
-            <a:off x="6678930" y="4895850"/>
-            <a:ext cx="10370820" cy="647700"/>
+          <p:cNvPr id="29" name="TextBox 28"/>
+          <p:cNvSpPr txBox="1"/>
+          <p:nvPr/>
+        </p:nvSpPr>
+        <p:spPr>
+          <a:xfrm>
+            <a:off x="6038850" y="4895850"/>
+            <a:ext cx="8732520" cy="647700"/>
           </a:xfrm>
           <a:prstGeom prst="rect">
             <a:avLst/>
@@ -14702,14 +14923,14 @@
       </p:sp>
       <p:sp>
         <p:nvSpPr>
-          <p:cNvPr id="24" name="Rounded Rectangle 23"/>
-          <p:cNvSpPr/>
-          <p:nvPr/>
-        </p:nvSpPr>
-        <p:spPr>
-          <a:xfrm>
-            <a:off x="1143000" y="5619750"/>
-            <a:ext cx="5402580" cy="647700"/>
+          <p:cNvPr id="30" name="Rounded Rectangle 29"/>
+          <p:cNvSpPr/>
+          <p:nvPr/>
+        </p:nvSpPr>
+        <p:spPr>
+          <a:xfrm>
+            <a:off x="14904720" y="4895850"/>
+            <a:ext cx="2240280" cy="647700"/>
           </a:xfrm>
           <a:prstGeom prst="roundRect">
             <a:avLst>
@@ -14717,6 +14938,81 @@
             </a:avLst>
           </a:prstGeom>
           <a:solidFill>
+            <a:srgbClr val="FAFBFD"/>
+          </a:solidFill>
+          <a:ln w="9525">
+            <a:solidFill>
+              <a:srgbClr val="DCE1E8"/>
+            </a:solidFill>
+          </a:ln>
+          <a:effectLst/>
+        </p:spPr>
+        <p:txBody>
+          <a:bodyPr rtlCol="0" anchor="ctr" wrap="square"/>
+          <a:lstStyle/>
+          <a:p>
+            <a:pPr algn="ctr"/>
+          </a:p>
+        </p:txBody>
+      </p:sp>
+      <p:sp>
+        <p:nvSpPr>
+          <p:cNvPr id="31" name="TextBox 30"/>
+          <p:cNvSpPr txBox="1"/>
+          <p:nvPr/>
+        </p:nvSpPr>
+        <p:spPr>
+          <a:xfrm>
+            <a:off x="14999970" y="4895850"/>
+            <a:ext cx="2049780" cy="647700"/>
+          </a:xfrm>
+          <a:prstGeom prst="rect">
+            <a:avLst/>
+          </a:prstGeom>
+          <a:noFill/>
+        </p:spPr>
+        <p:txBody>
+          <a:bodyPr wrap="square" lIns="0" rIns="0" tIns="0" bIns="0" anchor="ctr">
+            <a:spAutoFit/>
+          </a:bodyPr>
+          <a:lstStyle/>
+          <a:p>
+            <a:pPr algn="ctr">
+              <a:lnSpc>
+                <a:spcPct val="115000"/>
+              </a:lnSpc>
+            </a:pPr>
+            <a:r>
+              <a:rPr sz="1875" b="0">
+                <a:solidFill>
+                  <a:srgbClr val="3D3D3D"/>
+                </a:solidFill>
+                <a:latin typeface="Pretendard"/>
+                <a:ea typeface="Pretendard"/>
+                <a:cs typeface="Pretendard"/>
+              </a:rPr>
+              <a:t>4행</a:t>
+            </a:r>
+          </a:p>
+        </p:txBody>
+      </p:sp>
+      <p:sp>
+        <p:nvSpPr>
+          <p:cNvPr id="32" name="Rounded Rectangle 31"/>
+          <p:cNvSpPr/>
+          <p:nvPr/>
+        </p:nvSpPr>
+        <p:spPr>
+          <a:xfrm>
+            <a:off x="1143000" y="5619750"/>
+            <a:ext cx="4762500" cy="647700"/>
+          </a:xfrm>
+          <a:prstGeom prst="roundRect">
+            <a:avLst>
+              <a:gd name="adj" fmla="val 5882"/>
+            </a:avLst>
+          </a:prstGeom>
+          <a:solidFill>
             <a:srgbClr val="EDF3FD"/>
           </a:solidFill>
           <a:ln w="9525">
@@ -14736,14 +15032,14 @@
       </p:sp>
       <p:sp>
         <p:nvSpPr>
-          <p:cNvPr id="25" name="TextBox 24"/>
+          <p:cNvPr id="33" name="TextBox 32"/>
           <p:cNvSpPr txBox="1"/>
           <p:nvPr/>
         </p:nvSpPr>
         <p:spPr>
           <a:xfrm>
             <a:off x="1238250" y="5619750"/>
-            <a:ext cx="5212080" cy="647700"/>
+            <a:ext cx="4572000" cy="647700"/>
           </a:xfrm>
           <a:prstGeom prst="rect">
             <a:avLst/>
@@ -14777,14 +15073,14 @@
       </p:sp>
       <p:sp>
         <p:nvSpPr>
-          <p:cNvPr id="26" name="Rounded Rectangle 25"/>
-          <p:cNvSpPr/>
-          <p:nvPr/>
-        </p:nvSpPr>
-        <p:spPr>
-          <a:xfrm>
-            <a:off x="6583680" y="5619750"/>
-            <a:ext cx="10561320" cy="647700"/>
+          <p:cNvPr id="34" name="Rounded Rectangle 33"/>
+          <p:cNvSpPr/>
+          <p:nvPr/>
+        </p:nvSpPr>
+        <p:spPr>
+          <a:xfrm>
+            <a:off x="5943600" y="5619750"/>
+            <a:ext cx="8923020" cy="647700"/>
           </a:xfrm>
           <a:prstGeom prst="roundRect">
             <a:avLst>
@@ -14811,14 +15107,14 @@
       </p:sp>
       <p:sp>
         <p:nvSpPr>
-          <p:cNvPr id="27" name="TextBox 26"/>
-          <p:cNvSpPr txBox="1"/>
-          <p:nvPr/>
-        </p:nvSpPr>
-        <p:spPr>
-          <a:xfrm>
-            <a:off x="6678930" y="5619750"/>
-            <a:ext cx="10370820" cy="647700"/>
+          <p:cNvPr id="35" name="TextBox 34"/>
+          <p:cNvSpPr txBox="1"/>
+          <p:nvPr/>
+        </p:nvSpPr>
+        <p:spPr>
+          <a:xfrm>
+            <a:off x="6038850" y="5619750"/>
+            <a:ext cx="8732520" cy="647700"/>
           </a:xfrm>
           <a:prstGeom prst="rect">
             <a:avLst/>
@@ -14852,7 +15148,82 @@
       </p:sp>
       <p:sp>
         <p:nvSpPr>
-          <p:cNvPr id="28" name="TextBox 27"/>
+          <p:cNvPr id="36" name="Rounded Rectangle 35"/>
+          <p:cNvSpPr/>
+          <p:nvPr/>
+        </p:nvSpPr>
+        <p:spPr>
+          <a:xfrm>
+            <a:off x="14904720" y="5619750"/>
+            <a:ext cx="2240280" cy="647700"/>
+          </a:xfrm>
+          <a:prstGeom prst="roundRect">
+            <a:avLst>
+              <a:gd name="adj" fmla="val 5882"/>
+            </a:avLst>
+          </a:prstGeom>
+          <a:solidFill>
+            <a:srgbClr val="FAFBFD"/>
+          </a:solidFill>
+          <a:ln w="9525">
+            <a:solidFill>
+              <a:srgbClr val="DCE1E8"/>
+            </a:solidFill>
+          </a:ln>
+          <a:effectLst/>
+        </p:spPr>
+        <p:txBody>
+          <a:bodyPr rtlCol="0" anchor="ctr" wrap="square"/>
+          <a:lstStyle/>
+          <a:p>
+            <a:pPr algn="ctr"/>
+          </a:p>
+        </p:txBody>
+      </p:sp>
+      <p:sp>
+        <p:nvSpPr>
+          <p:cNvPr id="37" name="TextBox 36"/>
+          <p:cNvSpPr txBox="1"/>
+          <p:nvPr/>
+        </p:nvSpPr>
+        <p:spPr>
+          <a:xfrm>
+            <a:off x="14999970" y="5619750"/>
+            <a:ext cx="2049780" cy="647700"/>
+          </a:xfrm>
+          <a:prstGeom prst="rect">
+            <a:avLst/>
+          </a:prstGeom>
+          <a:noFill/>
+        </p:spPr>
+        <p:txBody>
+          <a:bodyPr wrap="square" lIns="0" rIns="0" tIns="0" bIns="0" anchor="ctr">
+            <a:spAutoFit/>
+          </a:bodyPr>
+          <a:lstStyle/>
+          <a:p>
+            <a:pPr algn="ctr">
+              <a:lnSpc>
+                <a:spcPct val="115000"/>
+              </a:lnSpc>
+            </a:pPr>
+            <a:r>
+              <a:rPr sz="1875" b="0">
+                <a:solidFill>
+                  <a:srgbClr val="3D3D3D"/>
+                </a:solidFill>
+                <a:latin typeface="Pretendard"/>
+                <a:ea typeface="Pretendard"/>
+                <a:cs typeface="Pretendard"/>
+              </a:rPr>
+              <a:t>2행</a:t>
+            </a:r>
+          </a:p>
+        </p:txBody>
+      </p:sp>
+      <p:sp>
+        <p:nvSpPr>
+          <p:cNvPr id="38" name="TextBox 37"/>
           <p:cNvSpPr txBox="1"/>
           <p:nvPr/>
         </p:nvSpPr>
@@ -14886,14 +15257,14 @@
                 <a:ea typeface="Pretendard"/>
                 <a:cs typeface="Pretendard"/>
               </a:rPr>
-              <a:t>files 에는 UPDATE 로 밀려난 옛 parquet 이 없다 — 저장소에는 남아 있어도 「현재 상태」가 아니라는 것을 메타데이터가 보장한다</a:t>
-            </a:r>
-          </a:p>
-        </p:txBody>
-      </p:sp>
-      <p:sp>
-        <p:nvSpPr>
-          <p:cNvPr id="29" name="Rectangle 28"/>
+              <a:t>저장소의 parquet 은 5 인데 files 는 4 — UPDATE 가 쓴 파일은 롤백으로 현재 상태에서 빠졌다</a:t>
+            </a:r>
+          </a:p>
+        </p:txBody>
+      </p:sp>
+      <p:sp>
+        <p:nvSpPr>
+          <p:cNvPr id="39" name="Rectangle 38"/>
           <p:cNvSpPr/>
           <p:nvPr/>
         </p:nvSpPr>
@@ -14923,7 +15294,7 @@
       </p:sp>
       <p:sp>
         <p:nvSpPr>
-          <p:cNvPr id="30" name="TextBox 29"/>
+          <p:cNvPr id="40" name="TextBox 39"/>
           <p:cNvSpPr txBox="1"/>
           <p:nvPr/>
         </p:nvSpPr>
@@ -14964,7 +15335,7 @@
       </p:sp>
       <p:sp>
         <p:nvSpPr>
-          <p:cNvPr id="31" name="TextBox 30"/>
+          <p:cNvPr id="41" name="TextBox 40"/>
           <p:cNvSpPr txBox="1"/>
           <p:nvPr/>
         </p:nvSpPr>
